--- a/m101/M101 - Presentacion.pptx
+++ b/m101/M101 - Presentacion.pptx
@@ -128,6 +128,11 @@
       </a:defRPr>
     </a:lvl9pPr>
   </p:defaultTextStyle>
+  <p:extLst>
+    <p:ext uri="{EFAFB233-063F-42B5-8137-9DF3F51BA10A}">
+      <p15:sldGuideLst xmlns:p15="http://schemas.microsoft.com/office/powerpoint/2012/main"/>
+    </p:ext>
+  </p:extLst>
 </p:presentation>
 </file>
 
@@ -5716,50 +5721,6 @@
                 <a:ea typeface="Avenir Next"/>
                 <a:cs typeface="Avenir Next"/>
               </a:rPr>
-              <a:t>Diplomado</a:t>
-            </a:r>
-            <a:r>
-              <a:rPr b="1" dirty="0">
-                <a:solidFill>
-                  <a:srgbClr val="FFFFFF"/>
-                </a:solidFill>
-                <a:latin typeface="Avenir Next"/>
-                <a:ea typeface="Avenir Next"/>
-                <a:cs typeface="Avenir Next"/>
-              </a:rPr>
-              <a:t> </a:t>
-            </a:r>
-            <a:r>
-              <a:rPr b="1" dirty="0" err="1">
-                <a:solidFill>
-                  <a:srgbClr val="FFFFFF"/>
-                </a:solidFill>
-                <a:latin typeface="Avenir Next"/>
-                <a:ea typeface="Avenir Next"/>
-                <a:cs typeface="Avenir Next"/>
-              </a:rPr>
-              <a:t>en</a:t>
-            </a:r>
-            <a:r>
-              <a:rPr b="1" dirty="0">
-                <a:solidFill>
-                  <a:srgbClr val="FFFFFF"/>
-                </a:solidFill>
-                <a:latin typeface="Avenir Next"/>
-                <a:ea typeface="Avenir Next"/>
-                <a:cs typeface="Avenir Next"/>
-              </a:rPr>
-              <a:t> </a:t>
-            </a:r>
-            <a:r>
-              <a:rPr b="1" dirty="0" err="1">
-                <a:solidFill>
-                  <a:srgbClr val="FFFFFF"/>
-                </a:solidFill>
-                <a:latin typeface="Avenir Next"/>
-                <a:ea typeface="Avenir Next"/>
-                <a:cs typeface="Avenir Next"/>
-              </a:rPr>
               <a:t>Inteligencia</a:t>
             </a:r>
             <a:r>
